--- a/Dice Agentic AI Final Project Presentation.pptx
+++ b/Dice Agentic AI Final Project Presentation.pptx
@@ -20,6 +20,8 @@
     <p:sldId id="264" r:id="rId14"/>
     <p:sldId id="308" r:id="rId15"/>
     <p:sldId id="302" r:id="rId16"/>
+    <p:sldId id="310" r:id="rId17"/>
+    <p:sldId id="309" r:id="rId18"/>
   </p:sldIdLst>
   <p:sldSz cx="9144000" cy="5143500" type="screen16x9"/>
   <p:notesSz cx="6858000" cy="9144000"/>
@@ -6968,7 +6970,7 @@
           <a:p>
             <a:r>
               <a:rPr lang="en-US" altLang="ko-KR" dirty="0"/>
-              <a:t>One Columns Style</a:t>
+              <a:t>Project Commands</a:t>
             </a:r>
             <a:endParaRPr lang="ko-KR" altLang="en-US" dirty="0"/>
           </a:p>
@@ -7006,7 +7008,7 @@
                 </a:solidFill>
                 <a:cs typeface="Arial" pitchFamily="34" charset="0"/>
               </a:rPr>
-              <a:t>Your Text Here</a:t>
+              <a:t>Commands</a:t>
             </a:r>
             <a:endParaRPr lang="ko-KR" altLang="en-US" sz="1600" b="1" dirty="0">
               <a:solidFill>
@@ -7397,7 +7399,7 @@
           <a:p>
             <a:r>
               <a:rPr lang="en-US" altLang="ko-KR" dirty="0"/>
-              <a:t>Q&amp;A Session</a:t>
+              <a:t>Further Improvements</a:t>
             </a:r>
           </a:p>
         </p:txBody>
@@ -7406,6 +7408,421 @@
     <p:extLst>
       <p:ext uri="{BB962C8B-B14F-4D97-AF65-F5344CB8AC3E}">
         <p14:creationId xmlns:p14="http://schemas.microsoft.com/office/powerpoint/2010/main" val="2621170082"/>
+      </p:ext>
+    </p:extLst>
+  </p:cSld>
+  <p:clrMapOvr>
+    <a:masterClrMapping/>
+  </p:clrMapOvr>
+</p:sld>
+</file>
+
+<file path=ppt/slides/slide14.xml><?xml version="1.0" encoding="utf-8"?>
+<p:sld xmlns:a="http://schemas.openxmlformats.org/drawingml/2006/main" xmlns:r="http://schemas.openxmlformats.org/officeDocument/2006/relationships" xmlns:p="http://schemas.openxmlformats.org/presentationml/2006/main">
+  <p:cSld>
+    <p:spTree>
+      <p:nvGrpSpPr>
+        <p:cNvPr id="1" name="">
+          <a:extLst>
+            <a:ext uri="{FF2B5EF4-FFF2-40B4-BE49-F238E27FC236}">
+              <a16:creationId xmlns:a16="http://schemas.microsoft.com/office/drawing/2014/main" id="{3E31AB0B-A04B-1EFB-9615-2D988BEA24CF}"/>
+            </a:ext>
+          </a:extLst>
+        </p:cNvPr>
+        <p:cNvGrpSpPr/>
+        <p:nvPr/>
+      </p:nvGrpSpPr>
+      <p:grpSpPr>
+        <a:xfrm>
+          <a:off x="0" y="0"/>
+          <a:ext cx="0" cy="0"/>
+          <a:chOff x="0" y="0"/>
+          <a:chExt cx="0" cy="0"/>
+        </a:xfrm>
+      </p:grpSpPr>
+      <p:sp>
+        <p:nvSpPr>
+          <p:cNvPr id="2" name="Text Placeholder 1">
+            <a:extLst>
+              <a:ext uri="{FF2B5EF4-FFF2-40B4-BE49-F238E27FC236}">
+                <a16:creationId xmlns:a16="http://schemas.microsoft.com/office/drawing/2014/main" id="{FB8BC639-1027-12DF-850D-3874443720A6}"/>
+              </a:ext>
+            </a:extLst>
+          </p:cNvPr>
+          <p:cNvSpPr>
+            <a:spLocks noGrp="1"/>
+          </p:cNvSpPr>
+          <p:nvPr>
+            <p:ph type="body" sz="quarter" idx="10"/>
+          </p:nvPr>
+        </p:nvSpPr>
+        <p:spPr/>
+        <p:txBody>
+          <a:bodyPr/>
+          <a:lstStyle/>
+          <a:p>
+            <a:r>
+              <a:rPr lang="en-US" altLang="ko-KR" dirty="0"/>
+              <a:t>Further Improvements</a:t>
+            </a:r>
+            <a:endParaRPr lang="ko-KR" altLang="en-US" dirty="0"/>
+          </a:p>
+        </p:txBody>
+      </p:sp>
+      <p:sp>
+        <p:nvSpPr>
+          <p:cNvPr id="3" name="TextBox 2">
+            <a:extLst>
+              <a:ext uri="{FF2B5EF4-FFF2-40B4-BE49-F238E27FC236}">
+                <a16:creationId xmlns:a16="http://schemas.microsoft.com/office/drawing/2014/main" id="{10DA2666-37EB-657C-3AD8-7B3788E6B613}"/>
+              </a:ext>
+            </a:extLst>
+          </p:cNvPr>
+          <p:cNvSpPr txBox="1"/>
+          <p:nvPr/>
+        </p:nvSpPr>
+        <p:spPr>
+          <a:xfrm>
+            <a:off x="2195736" y="1197160"/>
+            <a:ext cx="1816230" cy="338554"/>
+          </a:xfrm>
+          <a:prstGeom prst="rect">
+            <a:avLst/>
+          </a:prstGeom>
+          <a:solidFill>
+            <a:schemeClr val="accent2"/>
+          </a:solidFill>
+        </p:spPr>
+        <p:txBody>
+          <a:bodyPr wrap="square" rtlCol="0">
+            <a:spAutoFit/>
+          </a:bodyPr>
+          <a:lstStyle/>
+          <a:p>
+            <a:pPr algn="ctr"/>
+            <a:r>
+              <a:rPr lang="en-US" altLang="ko-KR" sz="1600" b="1" dirty="0">
+                <a:solidFill>
+                  <a:srgbClr val="444342"/>
+                </a:solidFill>
+                <a:cs typeface="Arial" pitchFamily="34" charset="0"/>
+              </a:rPr>
+              <a:t>Improvements</a:t>
+            </a:r>
+            <a:endParaRPr lang="ko-KR" altLang="en-US" sz="1600" b="1" dirty="0">
+              <a:solidFill>
+                <a:srgbClr val="444342"/>
+              </a:solidFill>
+              <a:cs typeface="Arial" pitchFamily="34" charset="0"/>
+            </a:endParaRPr>
+          </a:p>
+        </p:txBody>
+      </p:sp>
+      <p:sp>
+        <p:nvSpPr>
+          <p:cNvPr id="4" name="Rectangle 3">
+            <a:extLst>
+              <a:ext uri="{FF2B5EF4-FFF2-40B4-BE49-F238E27FC236}">
+                <a16:creationId xmlns:a16="http://schemas.microsoft.com/office/drawing/2014/main" id="{FCB7FFD0-A01F-6D16-4A06-C5C5AAFD9255}"/>
+              </a:ext>
+            </a:extLst>
+          </p:cNvPr>
+          <p:cNvSpPr/>
+          <p:nvPr/>
+        </p:nvSpPr>
+        <p:spPr>
+          <a:xfrm>
+            <a:off x="3085851" y="1535714"/>
+            <a:ext cx="36000" cy="3607786"/>
+          </a:xfrm>
+          <a:prstGeom prst="rect">
+            <a:avLst/>
+          </a:prstGeom>
+          <a:solidFill>
+            <a:schemeClr val="accent6"/>
+          </a:solidFill>
+          <a:ln>
+            <a:noFill/>
+          </a:ln>
+        </p:spPr>
+        <p:style>
+          <a:lnRef idx="2">
+            <a:schemeClr val="accent1">
+              <a:shade val="50000"/>
+            </a:schemeClr>
+          </a:lnRef>
+          <a:fillRef idx="1">
+            <a:schemeClr val="accent1"/>
+          </a:fillRef>
+          <a:effectRef idx="0">
+            <a:schemeClr val="accent1"/>
+          </a:effectRef>
+          <a:fontRef idx="minor">
+            <a:schemeClr val="lt1"/>
+          </a:fontRef>
+        </p:style>
+        <p:txBody>
+          <a:bodyPr rtlCol="0" anchor="ctr"/>
+          <a:lstStyle/>
+          <a:p>
+            <a:pPr algn="ctr"/>
+            <a:endParaRPr lang="ko-KR" altLang="en-US">
+              <a:solidFill>
+                <a:schemeClr val="tx1"/>
+              </a:solidFill>
+            </a:endParaRPr>
+          </a:p>
+        </p:txBody>
+      </p:sp>
+      <p:sp>
+        <p:nvSpPr>
+          <p:cNvPr id="5" name="TextBox 4">
+            <a:extLst>
+              <a:ext uri="{FF2B5EF4-FFF2-40B4-BE49-F238E27FC236}">
+                <a16:creationId xmlns:a16="http://schemas.microsoft.com/office/drawing/2014/main" id="{DB155D1C-603F-0FC5-9A70-0BB05A6648B5}"/>
+              </a:ext>
+            </a:extLst>
+          </p:cNvPr>
+          <p:cNvSpPr txBox="1"/>
+          <p:nvPr/>
+        </p:nvSpPr>
+        <p:spPr>
+          <a:xfrm>
+            <a:off x="4153452" y="915566"/>
+            <a:ext cx="4786436" cy="4524315"/>
+          </a:xfrm>
+          <a:prstGeom prst="rect">
+            <a:avLst/>
+          </a:prstGeom>
+          <a:noFill/>
+        </p:spPr>
+        <p:txBody>
+          <a:bodyPr wrap="square" rtlCol="0">
+            <a:spAutoFit/>
+          </a:bodyPr>
+          <a:lstStyle/>
+          <a:p>
+            <a:r>
+              <a:rPr lang="en-US" altLang="ko-KR" dirty="0">
+                <a:solidFill>
+                  <a:schemeClr val="bg1"/>
+                </a:solidFill>
+                <a:cs typeface="Arial" pitchFamily="34" charset="0"/>
+              </a:rPr>
+              <a:t>1. Cloud based LLM like ChatGPT</a:t>
+            </a:r>
+          </a:p>
+          <a:p>
+            <a:endParaRPr lang="en-US" altLang="ko-KR" dirty="0">
+              <a:solidFill>
+                <a:schemeClr val="bg1"/>
+              </a:solidFill>
+              <a:cs typeface="Arial" pitchFamily="34" charset="0"/>
+            </a:endParaRPr>
+          </a:p>
+          <a:p>
+            <a:r>
+              <a:rPr lang="en-US" altLang="ko-KR" dirty="0">
+                <a:solidFill>
+                  <a:schemeClr val="bg1"/>
+                </a:solidFill>
+                <a:cs typeface="Arial" pitchFamily="34" charset="0"/>
+              </a:rPr>
+              <a:t>2. Caching &amp; Rate Limiting</a:t>
+            </a:r>
+          </a:p>
+          <a:p>
+            <a:endParaRPr lang="en-US" altLang="ko-KR" dirty="0">
+              <a:solidFill>
+                <a:schemeClr val="bg1"/>
+              </a:solidFill>
+              <a:cs typeface="Arial" pitchFamily="34" charset="0"/>
+            </a:endParaRPr>
+          </a:p>
+          <a:p>
+            <a:r>
+              <a:rPr lang="en-US" altLang="ko-KR" dirty="0">
+                <a:solidFill>
+                  <a:schemeClr val="bg1"/>
+                </a:solidFill>
+                <a:cs typeface="Arial" pitchFamily="34" charset="0"/>
+              </a:rPr>
+              <a:t>3. FastAPI &amp; NextJS Integration</a:t>
+            </a:r>
+          </a:p>
+          <a:p>
+            <a:endParaRPr lang="en-US" altLang="ko-KR" dirty="0">
+              <a:solidFill>
+                <a:schemeClr val="bg1"/>
+              </a:solidFill>
+              <a:cs typeface="Arial" pitchFamily="34" charset="0"/>
+            </a:endParaRPr>
+          </a:p>
+          <a:p>
+            <a:r>
+              <a:rPr lang="en-US" altLang="ko-KR" dirty="0">
+                <a:solidFill>
+                  <a:schemeClr val="bg1"/>
+                </a:solidFill>
+                <a:cs typeface="Arial" pitchFamily="34" charset="0"/>
+              </a:rPr>
+              <a:t>4. Pg_Vector with PostgreSQL RDBMS</a:t>
+            </a:r>
+          </a:p>
+          <a:p>
+            <a:endParaRPr lang="en-US" altLang="ko-KR" dirty="0">
+              <a:solidFill>
+                <a:schemeClr val="bg1"/>
+              </a:solidFill>
+              <a:cs typeface="Arial" pitchFamily="34" charset="0"/>
+            </a:endParaRPr>
+          </a:p>
+          <a:p>
+            <a:r>
+              <a:rPr lang="en-US" altLang="ko-KR" dirty="0">
+                <a:solidFill>
+                  <a:schemeClr val="bg1"/>
+                </a:solidFill>
+                <a:cs typeface="Arial" pitchFamily="34" charset="0"/>
+              </a:rPr>
+              <a:t>5. Agent Harness &amp; Agentic RAG</a:t>
+            </a:r>
+          </a:p>
+          <a:p>
+            <a:endParaRPr lang="en-US" altLang="ko-KR" dirty="0">
+              <a:solidFill>
+                <a:schemeClr val="bg1"/>
+              </a:solidFill>
+              <a:cs typeface="Arial" pitchFamily="34" charset="0"/>
+            </a:endParaRPr>
+          </a:p>
+          <a:p>
+            <a:r>
+              <a:rPr lang="en-US" altLang="ko-KR" dirty="0">
+                <a:solidFill>
+                  <a:schemeClr val="bg1"/>
+                </a:solidFill>
+                <a:cs typeface="Arial" pitchFamily="34" charset="0"/>
+              </a:rPr>
+              <a:t>6. MCP &amp; A2A</a:t>
+            </a:r>
+          </a:p>
+          <a:p>
+            <a:endParaRPr lang="en-US" altLang="ko-KR" dirty="0">
+              <a:solidFill>
+                <a:schemeClr val="bg1"/>
+              </a:solidFill>
+              <a:cs typeface="Arial" pitchFamily="34" charset="0"/>
+            </a:endParaRPr>
+          </a:p>
+          <a:p>
+            <a:r>
+              <a:rPr lang="en-US" altLang="ko-KR" dirty="0">
+                <a:solidFill>
+                  <a:schemeClr val="bg1"/>
+                </a:solidFill>
+                <a:cs typeface="Arial" pitchFamily="34" charset="0"/>
+              </a:rPr>
+              <a:t>7. Eval and Monitoring </a:t>
+            </a:r>
+          </a:p>
+          <a:p>
+            <a:endParaRPr lang="en-US" altLang="ko-KR" dirty="0">
+              <a:solidFill>
+                <a:schemeClr val="bg1"/>
+              </a:solidFill>
+              <a:cs typeface="Arial" pitchFamily="34" charset="0"/>
+            </a:endParaRPr>
+          </a:p>
+          <a:p>
+            <a:r>
+              <a:rPr lang="en-US" altLang="ko-KR" dirty="0">
+                <a:solidFill>
+                  <a:schemeClr val="bg1"/>
+                </a:solidFill>
+                <a:cs typeface="Arial" pitchFamily="34" charset="0"/>
+              </a:rPr>
+              <a:t>8. ReACT </a:t>
+            </a:r>
+          </a:p>
+          <a:p>
+            <a:endParaRPr lang="en-US" altLang="ko-KR" dirty="0">
+              <a:solidFill>
+                <a:schemeClr val="bg1"/>
+              </a:solidFill>
+              <a:cs typeface="Arial" pitchFamily="34" charset="0"/>
+            </a:endParaRPr>
+          </a:p>
+        </p:txBody>
+      </p:sp>
+    </p:spTree>
+    <p:extLst>
+      <p:ext uri="{BB962C8B-B14F-4D97-AF65-F5344CB8AC3E}">
+        <p14:creationId xmlns:p14="http://schemas.microsoft.com/office/powerpoint/2010/main" val="379450455"/>
+      </p:ext>
+    </p:extLst>
+  </p:cSld>
+  <p:clrMapOvr>
+    <a:masterClrMapping/>
+  </p:clrMapOvr>
+</p:sld>
+</file>
+
+<file path=ppt/slides/slide15.xml><?xml version="1.0" encoding="utf-8"?>
+<p:sld xmlns:a="http://schemas.openxmlformats.org/drawingml/2006/main" xmlns:r="http://schemas.openxmlformats.org/officeDocument/2006/relationships" xmlns:p="http://schemas.openxmlformats.org/presentationml/2006/main">
+  <p:cSld>
+    <p:spTree>
+      <p:nvGrpSpPr>
+        <p:cNvPr id="1" name="">
+          <a:extLst>
+            <a:ext uri="{FF2B5EF4-FFF2-40B4-BE49-F238E27FC236}">
+              <a16:creationId xmlns:a16="http://schemas.microsoft.com/office/drawing/2014/main" id="{664B212B-5DC2-63FD-A4F4-B728CFF11E31}"/>
+            </a:ext>
+          </a:extLst>
+        </p:cNvPr>
+        <p:cNvGrpSpPr/>
+        <p:nvPr/>
+      </p:nvGrpSpPr>
+      <p:grpSpPr>
+        <a:xfrm>
+          <a:off x="0" y="0"/>
+          <a:ext cx="0" cy="0"/>
+          <a:chOff x="0" y="0"/>
+          <a:chExt cx="0" cy="0"/>
+        </a:xfrm>
+      </p:grpSpPr>
+      <p:sp>
+        <p:nvSpPr>
+          <p:cNvPr id="2" name="Text Placeholder 1">
+            <a:extLst>
+              <a:ext uri="{FF2B5EF4-FFF2-40B4-BE49-F238E27FC236}">
+                <a16:creationId xmlns:a16="http://schemas.microsoft.com/office/drawing/2014/main" id="{ECE7AF42-5CB6-D164-E503-0F36ACCF2235}"/>
+              </a:ext>
+            </a:extLst>
+          </p:cNvPr>
+          <p:cNvSpPr>
+            <a:spLocks noGrp="1"/>
+          </p:cNvSpPr>
+          <p:nvPr>
+            <p:ph type="body" sz="quarter" idx="10"/>
+          </p:nvPr>
+        </p:nvSpPr>
+        <p:spPr/>
+        <p:txBody>
+          <a:bodyPr/>
+          <a:lstStyle/>
+          <a:p>
+            <a:r>
+              <a:rPr lang="en-US" altLang="ko-KR" dirty="0"/>
+              <a:t>Q&amp;A Session</a:t>
+            </a:r>
+          </a:p>
+        </p:txBody>
+      </p:sp>
+    </p:spTree>
+    <p:extLst>
+      <p:ext uri="{BB962C8B-B14F-4D97-AF65-F5344CB8AC3E}">
+        <p14:creationId xmlns:p14="http://schemas.microsoft.com/office/powerpoint/2010/main" val="266994656"/>
       </p:ext>
     </p:extLst>
   </p:cSld>
@@ -10645,11 +11062,7 @@
           <a:p>
             <a:r>
               <a:rPr lang="en-US" altLang="ko-KR" dirty="0"/>
-              <a:t>2. Local LLM with </a:t>
-            </a:r>
-            <a:r>
-              <a:rPr lang="en-US" altLang="ko-KR" dirty="0" err="1"/>
-              <a:t>Ollama</a:t>
+              <a:t>2. Local LLM with Ollama</a:t>
             </a:r>
             <a:endParaRPr lang="ko-KR" altLang="en-US" dirty="0"/>
           </a:p>
@@ -10814,11 +11227,7 @@
           <a:p>
             <a:r>
               <a:rPr lang="en-US" altLang="ko-KR" dirty="0"/>
-              <a:t>2. Local LLM with </a:t>
-            </a:r>
-            <a:r>
-              <a:rPr lang="en-US" altLang="ko-KR" dirty="0" err="1"/>
-              <a:t>Ollama</a:t>
+              <a:t>2. Local LLM with Ollama</a:t>
             </a:r>
             <a:endParaRPr lang="ko-KR" altLang="en-US" dirty="0"/>
           </a:p>
